--- a/classes/parte-1-machine-learning-clasico/073-regularizacion-ridge-lasso-elastic-net/clase-073-regularizacion-ridge-lasso-elastic-net-presentacion.pptx
+++ b/classes/parte-1-machine-learning-clasico/073-regularizacion-ridge-lasso-elastic-net/clase-073-regularizacion-ridge-lasso-elastic-net-presentacion.pptx
@@ -4845,7 +4845,7 @@
                 </a:solidFill>
                 <a:latin typeface="Segoe UI"/>
               </a:rPr>
-              <a:t>Primer bloque ejecutable del notebook.</a:t>
+              <a:t>make_regression con 50 features de las cuales solo 10 son informativas. Lasso debería anular gran parte de las 40 ruidosas.</a:t>
             </a:r>
           </a:p>
         </p:txBody>
@@ -4932,7 +4932,197 @@
                 </a:solidFill>
                 <a:latin typeface="Courier New"/>
               </a:rPr>
-              <a:t># Imports y configuración inicial</a:t>
+              <a:t>import numpy as np</a:t>
+            </a:r>
+          </a:p>
+          <a:p>
+            <a:pPr>
+              <a:defRPr sz="1200" b="0">
+                <a:solidFill>
+                  <a:srgbClr val="F8FAFC"/>
+                </a:solidFill>
+                <a:latin typeface="Courier New"/>
+              </a:defRPr>
+            </a:pPr>
+            <a:r>
+              <a:rPr sz="1200" b="0">
+                <a:solidFill>
+                  <a:srgbClr val="F8FAFC"/>
+                </a:solidFill>
+                <a:latin typeface="Courier New"/>
+              </a:rPr>
+              <a:t>import matplotlib.pyplot as plt</a:t>
+            </a:r>
+          </a:p>
+          <a:p>
+            <a:pPr>
+              <a:defRPr sz="1200" b="0">
+                <a:solidFill>
+                  <a:srgbClr val="F8FAFC"/>
+                </a:solidFill>
+                <a:latin typeface="Courier New"/>
+              </a:defRPr>
+            </a:pPr>
+            <a:r>
+              <a:rPr sz="1200" b="0">
+                <a:solidFill>
+                  <a:srgbClr val="F8FAFC"/>
+                </a:solidFill>
+                <a:latin typeface="Courier New"/>
+              </a:rPr>
+              <a:t>from sklearn.datasets import make_regression</a:t>
+            </a:r>
+          </a:p>
+          <a:p>
+            <a:pPr>
+              <a:defRPr sz="1200" b="0">
+                <a:solidFill>
+                  <a:srgbClr val="F8FAFC"/>
+                </a:solidFill>
+                <a:latin typeface="Courier New"/>
+              </a:defRPr>
+            </a:pPr>
+            <a:r>
+              <a:rPr sz="1200" b="0">
+                <a:solidFill>
+                  <a:srgbClr val="F8FAFC"/>
+                </a:solidFill>
+                <a:latin typeface="Courier New"/>
+              </a:rPr>
+              <a:t>from sklearn.model_selection import train_test_split</a:t>
+            </a:r>
+          </a:p>
+          <a:p>
+            <a:pPr>
+              <a:defRPr sz="1200" b="0">
+                <a:solidFill>
+                  <a:srgbClr val="F8FAFC"/>
+                </a:solidFill>
+                <a:latin typeface="Courier New"/>
+              </a:defRPr>
+            </a:pPr>
+            <a:r>
+              <a:rPr sz="1200" b="0">
+                <a:solidFill>
+                  <a:srgbClr val="F8FAFC"/>
+                </a:solidFill>
+                <a:latin typeface="Courier New"/>
+              </a:rPr>
+              <a:t> </a:t>
+            </a:r>
+          </a:p>
+          <a:p>
+            <a:pPr>
+              <a:defRPr sz="1200" b="0">
+                <a:solidFill>
+                  <a:srgbClr val="F8FAFC"/>
+                </a:solidFill>
+                <a:latin typeface="Courier New"/>
+              </a:defRPr>
+            </a:pPr>
+            <a:r>
+              <a:rPr sz="1200" b="0">
+                <a:solidFill>
+                  <a:srgbClr val="F8FAFC"/>
+                </a:solidFill>
+                <a:latin typeface="Courier New"/>
+              </a:rPr>
+              <a:t>X, y, coef_true = make_regression(</a:t>
+            </a:r>
+          </a:p>
+          <a:p>
+            <a:pPr>
+              <a:defRPr sz="1200" b="0">
+                <a:solidFill>
+                  <a:srgbClr val="F8FAFC"/>
+                </a:solidFill>
+                <a:latin typeface="Courier New"/>
+              </a:defRPr>
+            </a:pPr>
+            <a:r>
+              <a:rPr sz="1200" b="0">
+                <a:solidFill>
+                  <a:srgbClr val="F8FAFC"/>
+                </a:solidFill>
+                <a:latin typeface="Courier New"/>
+              </a:rPr>
+              <a:t>    n_samples=200, n_features=50, n_informative=10, noise=10,</a:t>
+            </a:r>
+          </a:p>
+          <a:p>
+            <a:pPr>
+              <a:defRPr sz="1200" b="0">
+                <a:solidFill>
+                  <a:srgbClr val="F8FAFC"/>
+                </a:solidFill>
+                <a:latin typeface="Courier New"/>
+              </a:defRPr>
+            </a:pPr>
+            <a:r>
+              <a:rPr sz="1200" b="0">
+                <a:solidFill>
+                  <a:srgbClr val="F8FAFC"/>
+                </a:solidFill>
+                <a:latin typeface="Courier New"/>
+              </a:rPr>
+              <a:t>    coef=True, random_state=42)</a:t>
+            </a:r>
+          </a:p>
+          <a:p>
+            <a:pPr>
+              <a:defRPr sz="1200" b="0">
+                <a:solidFill>
+                  <a:srgbClr val="F8FAFC"/>
+                </a:solidFill>
+                <a:latin typeface="Courier New"/>
+              </a:defRPr>
+            </a:pPr>
+            <a:r>
+              <a:rPr sz="1200" b="0">
+                <a:solidFill>
+                  <a:srgbClr val="F8FAFC"/>
+                </a:solidFill>
+                <a:latin typeface="Courier New"/>
+              </a:rPr>
+              <a:t>Xtr, Xte, ytr, yte = train_test_split(X, y, test_size=0.2, random_state=42)</a:t>
+            </a:r>
+          </a:p>
+          <a:p>
+            <a:pPr>
+              <a:defRPr sz="1200" b="0">
+                <a:solidFill>
+                  <a:srgbClr val="F8FAFC"/>
+                </a:solidFill>
+                <a:latin typeface="Courier New"/>
+              </a:defRPr>
+            </a:pPr>
+            <a:r>
+              <a:rPr sz="1200" b="0">
+                <a:solidFill>
+                  <a:srgbClr val="F8FAFC"/>
+                </a:solidFill>
+                <a:latin typeface="Courier New"/>
+              </a:rPr>
+              <a:t>n_informativas = int((coef_true != 0).sum())</a:t>
+            </a:r>
+          </a:p>
+          <a:p>
+            <a:pPr>
+              <a:defRPr sz="1200" b="0">
+                <a:solidFill>
+                  <a:srgbClr val="F8FAFC"/>
+                </a:solidFill>
+                <a:latin typeface="Courier New"/>
+              </a:defRPr>
+            </a:pPr>
+            <a:r>
+              <a:rPr sz="1200" b="0">
+                <a:solidFill>
+                  <a:srgbClr val="F8FAFC"/>
+                </a:solidFill>
+                <a:latin typeface="Courier New"/>
+              </a:rPr>
+              <a:t>print('features:', X.shape[1], '| informativas reales:', n_informativas)</a:t>
             </a:r>
           </a:p>
         </p:txBody>

--- a/classes/parte-1-machine-learning-clasico/073-regularizacion-ridge-lasso-elastic-net/clase-073-regularizacion-ridge-lasso-elastic-net-presentacion.pptx
+++ b/classes/parte-1-machine-learning-clasico/073-regularizacion-ridge-lasso-elastic-net/clase-073-regularizacion-ridge-lasso-elastic-net-presentacion.pptx
@@ -3272,7 +3272,7 @@
                 </a:solidFill>
                 <a:latin typeface="Segoe UI"/>
               </a:rPr>
-              <a:t>Parte: 1 — Machine Learning Clásico · Fuente: Géron, cap. 4.  Duración estimada: 70 min.</a:t>
+              <a:t>Parte: 1 — Machine Learning Clásico · Fuente: Géron, cap. 4.  Duración estimada: 70 min. · Nivel: Intermedio</a:t>
             </a:r>
           </a:p>
         </p:txBody>
@@ -3581,7 +3581,7 @@
                 </a:solidFill>
                 <a:latin typeface="Segoe UI"/>
               </a:rPr>
-              <a:t>Parte: 1 — Machine Learning Clásico · Fuente: Géron, cap. 4.  Duración estimada: 70 min.</a:t>
+              <a:t>Parte: 1 — Machine Learning Clásico · Fuente: Géron, cap. 4.  Duración estimada: 70 min. · Nivel: Intermedio</a:t>
             </a:r>
           </a:p>
         </p:txBody>
